--- a/Foundation_F5/Workshop/F5-W04_Apply_Workshop_L07-L08_At_the_School_Nurse.pptx
+++ b/Foundation_F5/Workshop/F5-W04_Apply_Workshop_L07-L08_At_the_School_Nurse.pptx
@@ -5992,6 +5992,19 @@
               <a:buNone/>
             </a:pPr>
             <a:r>
+              <a:rPr lang="en-US" sz="1100" dirty="0">
+                <a:solidFill>
+                  <a:srgbClr val="5A6472"/>
+                </a:solidFill>
+                <a:latin typeface="Calibri" pitchFamily="34" charset="0"/>
+                <a:cs typeface="Amiri" pitchFamily="2" charset="-78"/>
+              </a:rPr>
+              <a:t>‏</a:t>
+            </a:r>
+            <a:pPr algn="l" indent="0" marL="0">
+              <a:buNone/>
+            </a:pPr>
+            <a:r>
               <a:rPr lang="ar-SA" altLang="en-US" sz="1450" dirty="0">
                 <a:solidFill>
                   <a:srgbClr val="5A6472"/>
@@ -6013,7 +6026,7 @@
                 <a:latin typeface="Calibri" pitchFamily="34" charset="0"/>
                 <a:cs typeface="Amiri" pitchFamily="2" charset="-78"/>
               </a:rPr>
-              <a:t> (point)</a:t>
+              <a:t>‏ (point)</a:t>
             </a:r>
             <a:endParaRPr lang="en-US" sz="1100" dirty="0"/>
           </a:p>
@@ -7448,7 +7461,7 @@
                 <a:latin typeface="Calibri" pitchFamily="34" charset="0"/>
                 <a:cs typeface="Amiri" pitchFamily="2" charset="-78"/>
               </a:rPr>
-              <a:t>Odd numbers come from F5-L07, even numbers from F5-L08. Core: a full sentence from the starter. Develop: add the “more” part. Stretch: link two answers with </a:t>
+              <a:t>Odd numbers come from F5-L07, even numbers from F5-L08. Core: a full sentence from the starter. Develop: add the “more” part. Stretch: link two answers with ‏</a:t>
             </a:r>
             <a:pPr algn="l" indent="0" marL="0">
               <a:buNone/>
@@ -7475,7 +7488,7 @@
                 <a:latin typeface="Calibri" pitchFamily="34" charset="0"/>
                 <a:cs typeface="Amiri" pitchFamily="2" charset="-78"/>
               </a:rPr>
-              <a:t>, </a:t>
+              <a:t>‏, ‏</a:t>
             </a:r>
             <a:pPr algn="l" indent="0" marL="0">
               <a:buNone/>
@@ -7502,7 +7515,7 @@
                 <a:latin typeface="Calibri" pitchFamily="34" charset="0"/>
                 <a:cs typeface="Amiri" pitchFamily="2" charset="-78"/>
               </a:rPr>
-              <a:t> or </a:t>
+              <a:t>‏ or ‏</a:t>
             </a:r>
             <a:pPr algn="l" indent="0" marL="0">
               <a:buNone/>
@@ -7529,7 +7542,7 @@
                 <a:latin typeface="Calibri" pitchFamily="34" charset="0"/>
                 <a:cs typeface="Amiri" pitchFamily="2" charset="-78"/>
               </a:rPr>
-              <a:t>. Swap after each question.</a:t>
+              <a:t>‏. Swap after each question.</a:t>
             </a:r>
             <a:endParaRPr lang="en-US" sz="1100" dirty="0"/>
           </a:p>
@@ -10852,7 +10865,7 @@
                 <a:latin typeface="Calibri" pitchFamily="34" charset="0"/>
                 <a:cs typeface="Amiri" pitchFamily="2" charset="-78"/>
               </a:rPr>
-              <a:t>Add two body parts (one dual) and </a:t>
+              <a:t>Add two body parts (one dual) and ‏</a:t>
             </a:r>
             <a:pPr algn="l" indent="0" marL="0">
               <a:buNone/>
@@ -10879,7 +10892,7 @@
                 <a:latin typeface="Calibri" pitchFamily="34" charset="0"/>
                 <a:cs typeface="Amiri" pitchFamily="2" charset="-78"/>
               </a:rPr>
-              <a:t> …</a:t>
+              <a:t> …‏</a:t>
             </a:r>
             <a:endParaRPr lang="en-US" sz="1150" dirty="0"/>
           </a:p>
@@ -11016,7 +11029,7 @@
                 <a:latin typeface="Calibri" pitchFamily="34" charset="0"/>
                 <a:cs typeface="Amiri" pitchFamily="2" charset="-78"/>
               </a:rPr>
-              <a:t>Add how you felt (</a:t>
+              <a:t>Add how you felt (‏</a:t>
             </a:r>
             <a:pPr algn="l" indent="0" marL="0">
               <a:buNone/>
@@ -11070,7 +11083,7 @@
                 <a:latin typeface="Calibri" pitchFamily="34" charset="0"/>
                 <a:cs typeface="Amiri" pitchFamily="2" charset="-78"/>
               </a:rPr>
-              <a:t>) and what you did: </a:t>
+              <a:t>‏) and what you did: ‏</a:t>
             </a:r>
             <a:pPr algn="l" indent="0" marL="0">
               <a:buNone/>
@@ -11097,7 +11110,7 @@
                 <a:latin typeface="Calibri" pitchFamily="34" charset="0"/>
                 <a:cs typeface="Amiri" pitchFamily="2" charset="-78"/>
               </a:rPr>
-              <a:t> …</a:t>
+              <a:t> …‏</a:t>
             </a:r>
             <a:endParaRPr lang="en-US" sz="1150" dirty="0"/>
           </a:p>
@@ -17539,7 +17552,7 @@
                 <a:latin typeface="Calibri" pitchFamily="34" charset="0"/>
                 <a:cs typeface="Amiri" pitchFamily="2" charset="-78"/>
               </a:rPr>
-              <a:t>Body pairs (</a:t>
+              <a:t>Body pairs (‏</a:t>
             </a:r>
             <a:pPr algn="l" indent="0" marL="0">
               <a:buNone/>
@@ -17674,7 +17687,7 @@
                 <a:latin typeface="Calibri" pitchFamily="34" charset="0"/>
                 <a:cs typeface="Amiri" pitchFamily="2" charset="-78"/>
               </a:rPr>
-              <a:t>) are feminine.</a:t>
+              <a:t>‏) are feminine.</a:t>
             </a:r>
             <a:endParaRPr lang="en-US" sz="1150" dirty="0"/>
           </a:p>
@@ -17885,7 +17898,7 @@
                 <a:latin typeface="Calibri" pitchFamily="34" charset="0"/>
                 <a:cs typeface="Amiri" pitchFamily="2" charset="-78"/>
               </a:rPr>
-              <a:t>Since / for = </a:t>
+              <a:t>Since / for = ‏</a:t>
             </a:r>
             <a:pPr algn="l" indent="0" marL="0">
               <a:buNone/>
@@ -17912,7 +17925,7 @@
                 <a:latin typeface="Calibri" pitchFamily="34" charset="0"/>
                 <a:cs typeface="Amiri" pitchFamily="2" charset="-78"/>
               </a:rPr>
-              <a:t>.</a:t>
+              <a:t>‏.</a:t>
             </a:r>
             <a:endParaRPr lang="en-US" sz="1150" dirty="0"/>
           </a:p>
@@ -18123,7 +18136,7 @@
                 <a:latin typeface="Calibri" pitchFamily="34" charset="0"/>
                 <a:cs typeface="Amiri" pitchFamily="2" charset="-78"/>
               </a:rPr>
-              <a:t>Use the dual: </a:t>
+              <a:t>Use the dual: ‏</a:t>
             </a:r>
             <a:pPr algn="l" indent="0" marL="0">
               <a:buNone/>
@@ -18150,7 +18163,7 @@
                 <a:latin typeface="Calibri" pitchFamily="34" charset="0"/>
                 <a:cs typeface="Amiri" pitchFamily="2" charset="-78"/>
               </a:rPr>
-              <a:t>.</a:t>
+              <a:t>‏.</a:t>
             </a:r>
             <a:endParaRPr lang="en-US" sz="1150" dirty="0"/>
           </a:p>
@@ -20273,7 +20286,7 @@
                 <a:latin typeface="Calibri" pitchFamily="34" charset="0"/>
                 <a:cs typeface="Amiri" pitchFamily="2" charset="-78"/>
               </a:rPr>
-              <a:t>☐  At least one </a:t>
+              <a:t>☐  At least one ‏</a:t>
             </a:r>
             <a:pPr algn="l" indent="0" marL="0">
               <a:buNone/>
@@ -20300,7 +20313,7 @@
                 <a:latin typeface="Calibri" pitchFamily="34" charset="0"/>
                 <a:cs typeface="Amiri" pitchFamily="2" charset="-78"/>
               </a:rPr>
-              <a:t> and one </a:t>
+              <a:t>‏ and one ‏</a:t>
             </a:r>
             <a:pPr algn="l" indent="0" marL="0">
               <a:buNone/>
@@ -20327,7 +20340,7 @@
                 <a:latin typeface="Calibri" pitchFamily="34" charset="0"/>
                 <a:cs typeface="Amiri" pitchFamily="2" charset="-78"/>
               </a:rPr>
-              <a:t> (Develop).</a:t>
+              <a:t>‏ (Develop).</a:t>
             </a:r>
             <a:endParaRPr lang="en-US" sz="1200" dirty="0"/>
           </a:p>
@@ -23651,7 +23664,7 @@
                 <a:latin typeface="Calibri" pitchFamily="34" charset="0"/>
                 <a:cs typeface="Amiri" pitchFamily="2" charset="-78"/>
               </a:rPr>
-              <a:t>use </a:t>
+              <a:t>use ‏</a:t>
             </a:r>
             <a:pPr algn="l" indent="0" marL="0">
               <a:buNone/>
@@ -23678,7 +23691,7 @@
                 <a:latin typeface="Calibri" pitchFamily="34" charset="0"/>
                 <a:cs typeface="Amiri" pitchFamily="2" charset="-78"/>
               </a:rPr>
-              <a:t> for the feminine body parts (</a:t>
+              <a:t>‏ for the feminine body parts (‏</a:t>
             </a:r>
             <a:pPr algn="l" indent="0" marL="0">
               <a:buNone/>
@@ -23759,7 +23772,7 @@
                 <a:latin typeface="Calibri" pitchFamily="34" charset="0"/>
                 <a:cs typeface="Amiri" pitchFamily="2" charset="-78"/>
               </a:rPr>
-              <a:t> …)?</a:t>
+              <a:t> …‏)?</a:t>
             </a:r>
             <a:endParaRPr lang="en-US" sz="1100" dirty="0"/>
           </a:p>
@@ -23983,7 +23996,7 @@
                 <a:latin typeface="Calibri" pitchFamily="34" charset="0"/>
                 <a:cs typeface="Amiri" pitchFamily="2" charset="-78"/>
               </a:rPr>
-              <a:t>say where it hurts (</a:t>
+              <a:t>say where it hurts (‏</a:t>
             </a:r>
             <a:pPr algn="l" indent="0" marL="0">
               <a:buNone/>
@@ -24010,7 +24023,7 @@
                 <a:latin typeface="Calibri" pitchFamily="34" charset="0"/>
                 <a:cs typeface="Amiri" pitchFamily="2" charset="-78"/>
               </a:rPr>
-              <a:t> …) and agree </a:t>
+              <a:t> …‏) and agree ‏</a:t>
             </a:r>
             <a:pPr algn="l" indent="0" marL="0">
               <a:buNone/>
@@ -24037,7 +24050,7 @@
                 <a:latin typeface="Calibri" pitchFamily="34" charset="0"/>
                 <a:cs typeface="Amiri" pitchFamily="2" charset="-78"/>
               </a:rPr>
-              <a:t>?</a:t>
+              <a:t>‏?</a:t>
             </a:r>
             <a:endParaRPr lang="en-US" sz="1100" dirty="0"/>
           </a:p>
@@ -24196,7 +24209,7 @@
                 <a:latin typeface="Calibri" pitchFamily="34" charset="0"/>
                 <a:cs typeface="Amiri" pitchFamily="2" charset="-78"/>
               </a:rPr>
-              <a:t>use linking words (</a:t>
+              <a:t>use linking words (‏</a:t>
             </a:r>
             <a:pPr algn="l" indent="0" marL="0">
               <a:buNone/>
@@ -24304,7 +24317,7 @@
                 <a:latin typeface="Calibri" pitchFamily="34" charset="0"/>
                 <a:cs typeface="Amiri" pitchFamily="2" charset="-78"/>
               </a:rPr>
-              <a:t>)?</a:t>
+              <a:t>‏)?</a:t>
             </a:r>
             <a:endParaRPr lang="en-US" sz="1100" dirty="0"/>
           </a:p>
@@ -28250,7 +28263,7 @@
                 <a:latin typeface="Calibri" pitchFamily="34" charset="0"/>
                 <a:cs typeface="Amiri" pitchFamily="2" charset="-78"/>
               </a:rPr>
-              <a:t>I added reasons (</a:t>
+              <a:t>I added reasons (‏</a:t>
             </a:r>
             <a:pPr algn="l" indent="0" marL="0">
               <a:buNone/>
@@ -28277,7 +28290,7 @@
                 <a:latin typeface="Calibri" pitchFamily="34" charset="0"/>
                 <a:cs typeface="Amiri" pitchFamily="2" charset="-78"/>
               </a:rPr>
-              <a:t>) and extra details without frames.</a:t>
+              <a:t>‏) and extra details without frames.</a:t>
             </a:r>
             <a:endParaRPr lang="en-US" sz="1300" dirty="0"/>
           </a:p>
@@ -32405,7 +32418,7 @@
                 <a:latin typeface="Calibri" pitchFamily="34" charset="0"/>
                 <a:cs typeface="Amiri" pitchFamily="2" charset="-78"/>
               </a:rPr>
-              <a:t>☐  Add a reason (</a:t>
+              <a:t>☐  Add a reason (‏</a:t>
             </a:r>
             <a:pPr algn="l" indent="0" marL="0">
               <a:buNone/>
@@ -32432,7 +32445,7 @@
                 <a:latin typeface="Calibri" pitchFamily="34" charset="0"/>
                 <a:cs typeface="Amiri" pitchFamily="2" charset="-78"/>
               </a:rPr>
-              <a:t>) and an extra detail to every point.</a:t>
+              <a:t>‏) and an extra detail to every point.</a:t>
             </a:r>
             <a:endParaRPr lang="en-US" sz="1300" dirty="0"/>
           </a:p>
@@ -33953,7 +33966,7 @@
                 <a:latin typeface="Calibri" pitchFamily="34" charset="0"/>
                 <a:cs typeface="Amiri" pitchFamily="2" charset="-78"/>
               </a:rPr>
-              <a:t>Join a word from each lesson in one sentence with </a:t>
+              <a:t>Join a word from each lesson in one sentence with ‏</a:t>
             </a:r>
             <a:pPr algn="l" indent="0" marL="0">
               <a:buNone/>
@@ -33980,7 +33993,7 @@
                 <a:latin typeface="Calibri" pitchFamily="34" charset="0"/>
                 <a:cs typeface="Amiri" pitchFamily="2" charset="-78"/>
               </a:rPr>
-              <a:t> or </a:t>
+              <a:t>‏ or ‏</a:t>
             </a:r>
             <a:pPr algn="l" indent="0" marL="0">
               <a:buNone/>
@@ -34007,7 +34020,7 @@
                 <a:latin typeface="Calibri" pitchFamily="34" charset="0"/>
                 <a:cs typeface="Amiri" pitchFamily="2" charset="-78"/>
               </a:rPr>
-              <a:t>.</a:t>
+              <a:t>‏.</a:t>
             </a:r>
             <a:endParaRPr lang="en-US" sz="1150" dirty="0"/>
           </a:p>
